--- a/高级软件工程.pptx
+++ b/高级软件工程.pptx
@@ -6,6 +6,10 @@
   </p:sldMasterIdLst>
   <p:sldIdLst>
     <p:sldId id="256" r:id="rId3"/>
+    <p:sldId id="257" r:id="rId4"/>
+    <p:sldId id="258" r:id="rId5"/>
+    <p:sldId id="259" r:id="rId6"/>
+    <p:sldId id="260" r:id="rId7"/>
   </p:sldIdLst>
   <p:sldSz cx="12192000" cy="6858000"/>
   <p:notesSz cx="6858000" cy="9144000"/>
@@ -2944,7 +2948,15 @@
         <p:txBody>
           <a:bodyPr/>
           <a:p>
-            <a:endParaRPr lang="zh-CN" altLang="en-US"/>
+            <a:r>
+              <a:rPr lang="en-US" altLang="zh-CN" sz="4400"/>
+              <a:t>YOLOv8 </a:t>
+            </a:r>
+            <a:r>
+              <a:rPr lang="zh-CN" altLang="en-US" sz="4400"/>
+              <a:t>算法解析与小目标检测优化</a:t>
+            </a:r>
+            <a:endParaRPr lang="zh-CN" altLang="en-US" sz="4400"/>
           </a:p>
         </p:txBody>
       </p:sp>
@@ -2962,10 +2974,901 @@
         <p:txBody>
           <a:bodyPr/>
           <a:p>
-            <a:endParaRPr lang="zh-CN" altLang="en-US"/>
-          </a:p>
-        </p:txBody>
-      </p:sp>
+            <a:r>
+              <a:rPr lang="en-US" altLang="zh-CN"/>
+              <a:t>S202513003 </a:t>
+            </a:r>
+            <a:r>
+              <a:rPr lang="zh-CN" altLang="en-US"/>
+              <a:t>龚柏</a:t>
+            </a:r>
+            <a:r>
+              <a:rPr lang="zh-CN" altLang="en-US"/>
+              <a:t>荣</a:t>
+            </a:r>
+            <a:endParaRPr lang="zh-CN" altLang="en-US"/>
+          </a:p>
+        </p:txBody>
+      </p:sp>
+    </p:spTree>
+  </p:cSld>
+  <p:clrMapOvr>
+    <a:masterClrMapping/>
+  </p:clrMapOvr>
+</p:sld>
+</file>
+
+<file path=ppt/slides/slide2.xml><?xml version="1.0" encoding="utf-8"?>
+<p:sld xmlns:a="http://schemas.openxmlformats.org/drawingml/2006/main" xmlns:r="http://schemas.openxmlformats.org/officeDocument/2006/relationships" xmlns:p="http://schemas.openxmlformats.org/presentationml/2006/main">
+  <p:cSld>
+    <p:spTree>
+      <p:nvGrpSpPr>
+        <p:cNvPr id="1" name=""/>
+        <p:cNvGrpSpPr/>
+        <p:nvPr/>
+      </p:nvGrpSpPr>
+      <p:grpSpPr/>
+      <p:pic>
+        <p:nvPicPr>
+          <p:cNvPr id="4" name="内容占位符 3"/>
+          <p:cNvPicPr>
+            <a:picLocks noChangeAspect="1"/>
+          </p:cNvPicPr>
+          <p:nvPr>
+            <p:ph idx="1"/>
+          </p:nvPr>
+        </p:nvPicPr>
+        <p:blipFill>
+          <a:blip r:embed="rId1"/>
+          <a:stretch>
+            <a:fillRect/>
+          </a:stretch>
+        </p:blipFill>
+        <p:spPr>
+          <a:xfrm>
+            <a:off x="1778635" y="154940"/>
+            <a:ext cx="8019415" cy="6376670"/>
+          </a:xfrm>
+          <a:prstGeom prst="rect">
+            <a:avLst/>
+          </a:prstGeom>
+        </p:spPr>
+      </p:pic>
+    </p:spTree>
+  </p:cSld>
+  <p:clrMapOvr>
+    <a:masterClrMapping/>
+  </p:clrMapOvr>
+</p:sld>
+</file>
+
+<file path=ppt/slides/slide3.xml><?xml version="1.0" encoding="utf-8"?>
+<p:sld xmlns:a="http://schemas.openxmlformats.org/drawingml/2006/main" xmlns:r="http://schemas.openxmlformats.org/officeDocument/2006/relationships" xmlns:p="http://schemas.openxmlformats.org/presentationml/2006/main">
+  <p:cSld>
+    <p:spTree>
+      <p:nvGrpSpPr>
+        <p:cNvPr id="1" name=""/>
+        <p:cNvGrpSpPr/>
+        <p:nvPr/>
+      </p:nvGrpSpPr>
+      <p:grpSpPr/>
+      <p:pic>
+        <p:nvPicPr>
+          <p:cNvPr id="4" name="图片 3"/>
+          <p:cNvPicPr>
+            <a:picLocks noChangeAspect="1"/>
+          </p:cNvPicPr>
+          <p:nvPr/>
+        </p:nvPicPr>
+        <p:blipFill>
+          <a:blip r:embed="rId1"/>
+          <a:stretch>
+            <a:fillRect/>
+          </a:stretch>
+        </p:blipFill>
+        <p:spPr>
+          <a:xfrm>
+            <a:off x="5985510" y="2146935"/>
+            <a:ext cx="5238750" cy="3916680"/>
+          </a:xfrm>
+          <a:prstGeom prst="rect">
+            <a:avLst/>
+          </a:prstGeom>
+        </p:spPr>
+      </p:pic>
+      <p:sp>
+        <p:nvSpPr>
+          <p:cNvPr id="5" name="AutoShape 2"/>
+          <p:cNvSpPr/>
+          <p:nvPr/>
+        </p:nvSpPr>
+        <p:spPr>
+          <a:xfrm>
+            <a:off x="762000" y="508000"/>
+            <a:ext cx="3581400" cy="508000"/>
+          </a:xfrm>
+          <a:prstGeom prst="rect">
+            <a:avLst/>
+          </a:prstGeom>
+          <a:noFill/>
+          <a:ln w="12700" cap="flat" cmpd="sng">
+            <a:noFill/>
+            <a:prstDash val="solid"/>
+            <a:round/>
+          </a:ln>
+        </p:spPr>
+        <p:txBody>
+          <a:bodyPr vert="horz" wrap="none" lIns="0" tIns="0" rIns="0" bIns="0" rtlCol="0" anchor="ctr" anchorCtr="0"/>
+          <a:p>
+            <a:pPr indent="0" algn="l">
+              <a:lnSpc>
+                <a:spcPct val="125000"/>
+              </a:lnSpc>
+              <a:defRPr/>
+            </a:pPr>
+            <a:r>
+              <a:rPr lang="en-US" altLang="zh-CN" sz="3200" b="1" dirty="0">
+                <a:solidFill>
+                  <a:srgbClr val="0052FF"/>
+                </a:solidFill>
+                <a:ea typeface="Noto Sans SC" panose="020B0200000000000000" charset="-122"/>
+                <a:sym typeface="Noto Sans SC" panose="020B0200000000000000" charset="-122"/>
+              </a:rPr>
+              <a:t>1.1 YOLO </a:t>
+            </a:r>
+            <a:r>
+              <a:rPr lang="zh-CN" altLang="en-US" sz="3200" b="1" dirty="0">
+                <a:solidFill>
+                  <a:srgbClr val="0052FF"/>
+                </a:solidFill>
+                <a:ea typeface="Noto Sans SC" panose="020B0200000000000000" charset="-122"/>
+                <a:sym typeface="Noto Sans SC" panose="020B0200000000000000" charset="-122"/>
+              </a:rPr>
+              <a:t>概述</a:t>
+            </a:r>
+            <a:endParaRPr lang="zh-CN" altLang="en-US" sz="3200" b="1" dirty="0">
+              <a:solidFill>
+                <a:srgbClr val="0052FF"/>
+              </a:solidFill>
+              <a:ea typeface="Noto Sans SC" panose="020B0200000000000000" charset="-122"/>
+              <a:sym typeface="Noto Sans SC" panose="020B0200000000000000" charset="-122"/>
+            </a:endParaRPr>
+          </a:p>
+        </p:txBody>
+      </p:sp>
+      <p:sp>
+        <p:nvSpPr>
+          <p:cNvPr id="6" name="AutoShape 3"/>
+          <p:cNvSpPr/>
+          <p:nvPr/>
+        </p:nvSpPr>
+        <p:spPr>
+          <a:xfrm>
+            <a:off x="762000" y="1079500"/>
+            <a:ext cx="508000" cy="50800"/>
+          </a:xfrm>
+          <a:prstGeom prst="roundRect">
+            <a:avLst>
+              <a:gd name="adj" fmla="val 0"/>
+            </a:avLst>
+          </a:prstGeom>
+          <a:solidFill>
+            <a:srgbClr val="0052FF">
+              <a:alpha val="100000"/>
+            </a:srgbClr>
+          </a:solidFill>
+          <a:ln w="25400" cap="flat" cmpd="sng">
+            <a:noFill/>
+            <a:prstDash val="solid"/>
+            <a:round/>
+          </a:ln>
+        </p:spPr>
+        <p:txBody>
+          <a:bodyPr vert="horz" wrap="square" lIns="63500" tIns="63500" rIns="63500" bIns="63500" rtlCol="0" anchor="ctr"/>
+          <a:p>
+            <a:pPr algn="ctr">
+              <a:defRPr/>
+            </a:pPr>
+          </a:p>
+        </p:txBody>
+      </p:sp>
+      <p:sp>
+        <p:nvSpPr>
+          <p:cNvPr id="7" name="文本框 6"/>
+          <p:cNvSpPr txBox="1"/>
+          <p:nvPr/>
+        </p:nvSpPr>
+        <p:spPr>
+          <a:xfrm>
+            <a:off x="268605" y="1384935"/>
+            <a:ext cx="10468610" cy="645160"/>
+          </a:xfrm>
+          <a:prstGeom prst="rect">
+            <a:avLst/>
+          </a:prstGeom>
+          <a:noFill/>
+        </p:spPr>
+        <p:txBody>
+          <a:bodyPr wrap="square" rtlCol="0">
+            <a:spAutoFit/>
+          </a:bodyPr>
+          <a:p>
+            <a:r>
+              <a:rPr lang="en-US" altLang="zh-CN"/>
+              <a:t>YOLO </a:t>
+            </a:r>
+            <a:r>
+              <a:rPr lang="zh-CN" altLang="en-US"/>
+              <a:t>目标检测是一种计算机视觉任务，其目标是在图像中识别并定位出对应</a:t>
+            </a:r>
+            <a:r>
+              <a:rPr lang="zh-CN" altLang="en-US"/>
+              <a:t>的物体。</a:t>
+            </a:r>
+            <a:endParaRPr lang="zh-CN" altLang="en-US"/>
+          </a:p>
+          <a:p>
+            <a:endParaRPr lang="zh-CN" altLang="en-US"/>
+          </a:p>
+        </p:txBody>
+      </p:sp>
+      <p:sp>
+        <p:nvSpPr>
+          <p:cNvPr id="8" name="文本框 7"/>
+          <p:cNvSpPr txBox="1"/>
+          <p:nvPr/>
+        </p:nvSpPr>
+        <p:spPr>
+          <a:xfrm>
+            <a:off x="356235" y="1897380"/>
+            <a:ext cx="5494655" cy="1977390"/>
+          </a:xfrm>
+          <a:prstGeom prst="rect">
+            <a:avLst/>
+          </a:prstGeom>
+          <a:noFill/>
+        </p:spPr>
+        <p:txBody>
+          <a:bodyPr wrap="square" rtlCol="0">
+            <a:noAutofit/>
+          </a:bodyPr>
+          <a:p>
+            <a:r>
+              <a:rPr lang="zh-CN" altLang="en-US"/>
+              <a:t>主要有两个任务</a:t>
+            </a:r>
+            <a:r>
+              <a:rPr lang="en-US" altLang="zh-CN"/>
+              <a:t>:</a:t>
+            </a:r>
+            <a:endParaRPr lang="en-US" altLang="zh-CN"/>
+          </a:p>
+          <a:p>
+            <a:endParaRPr lang="en-US" altLang="zh-CN"/>
+          </a:p>
+          <a:p>
+            <a:r>
+              <a:rPr lang="en-US" altLang="zh-CN"/>
+              <a:t>1. </a:t>
+            </a:r>
+            <a:r>
+              <a:rPr lang="zh-CN" altLang="en-US"/>
+              <a:t>确定各物体的位置和边界。</a:t>
+            </a:r>
+            <a:r>
+              <a:rPr lang="en-US" altLang="zh-CN"/>
+              <a:t>  </a:t>
+            </a:r>
+            <a:endParaRPr lang="en-US" altLang="zh-CN"/>
+          </a:p>
+          <a:p>
+            <a:endParaRPr lang="en-US" altLang="zh-CN"/>
+          </a:p>
+          <a:p>
+            <a:r>
+              <a:rPr lang="en-US" altLang="zh-CN"/>
+              <a:t>2. </a:t>
+            </a:r>
+            <a:r>
+              <a:rPr lang="zh-CN" altLang="en-US"/>
+              <a:t>将这些物体分类到不同的类别中。</a:t>
+            </a:r>
+            <a:endParaRPr lang="zh-CN" altLang="en-US"/>
+          </a:p>
+          <a:p>
+            <a:pPr indent="457200"/>
+            <a:endParaRPr lang="en-US" altLang="zh-CN"/>
+          </a:p>
+          <a:p>
+            <a:pPr indent="457200"/>
+            <a:endParaRPr lang="en-US" altLang="zh-CN"/>
+          </a:p>
+          <a:p>
+            <a:pPr indent="457200"/>
+            <a:endParaRPr lang="en-US" altLang="zh-CN"/>
+          </a:p>
+        </p:txBody>
+      </p:sp>
+      <p:sp>
+        <p:nvSpPr>
+          <p:cNvPr id="9" name="文本框 8"/>
+          <p:cNvSpPr txBox="1"/>
+          <p:nvPr/>
+        </p:nvSpPr>
+        <p:spPr>
+          <a:xfrm>
+            <a:off x="268605" y="3611245"/>
+            <a:ext cx="5212080" cy="1476375"/>
+          </a:xfrm>
+          <a:prstGeom prst="rect">
+            <a:avLst/>
+          </a:prstGeom>
+          <a:noFill/>
+        </p:spPr>
+        <p:txBody>
+          <a:bodyPr wrap="square" rtlCol="0">
+            <a:spAutoFit/>
+          </a:bodyPr>
+          <a:p>
+            <a:r>
+              <a:rPr lang="zh-CN" altLang="en-US"/>
+              <a:t>目前最先进的方法可分为以下两大类：</a:t>
+            </a:r>
+            <a:endParaRPr lang="zh-CN" altLang="en-US"/>
+          </a:p>
+          <a:p>
+            <a:endParaRPr lang="en-US" altLang="zh-CN"/>
+          </a:p>
+          <a:p>
+            <a:r>
+              <a:rPr lang="en-US" altLang="zh-CN"/>
+              <a:t>- </a:t>
+            </a:r>
+            <a:r>
+              <a:rPr lang="zh-CN" altLang="en-US"/>
+              <a:t>单阶段方法</a:t>
+            </a:r>
+            <a:endParaRPr lang="zh-CN" altLang="en-US"/>
+          </a:p>
+          <a:p>
+            <a:endParaRPr lang="zh-CN" altLang="en-US"/>
+          </a:p>
+          <a:p>
+            <a:r>
+              <a:rPr lang="en-US" altLang="zh-CN"/>
+              <a:t>- </a:t>
+            </a:r>
+            <a:r>
+              <a:rPr lang="zh-CN" altLang="en-US"/>
+              <a:t>双阶段方法</a:t>
+            </a:r>
+            <a:endParaRPr lang="zh-CN" altLang="en-US"/>
+          </a:p>
+        </p:txBody>
+      </p:sp>
+    </p:spTree>
+  </p:cSld>
+  <p:clrMapOvr>
+    <a:masterClrMapping/>
+  </p:clrMapOvr>
+</p:sld>
+</file>
+
+<file path=ppt/slides/slide4.xml><?xml version="1.0" encoding="utf-8"?>
+<p:sld xmlns:a="http://schemas.openxmlformats.org/drawingml/2006/main" xmlns:r="http://schemas.openxmlformats.org/officeDocument/2006/relationships" xmlns:p="http://schemas.openxmlformats.org/presentationml/2006/main">
+  <p:cSld>
+    <p:spTree>
+      <p:nvGrpSpPr>
+        <p:cNvPr id="1" name=""/>
+        <p:cNvGrpSpPr/>
+        <p:nvPr/>
+      </p:nvGrpSpPr>
+      <p:grpSpPr/>
+      <p:sp>
+        <p:nvSpPr>
+          <p:cNvPr id="5" name="AutoShape 2"/>
+          <p:cNvSpPr/>
+          <p:nvPr/>
+        </p:nvSpPr>
+        <p:spPr>
+          <a:xfrm>
+            <a:off x="762000" y="508000"/>
+            <a:ext cx="3581400" cy="508000"/>
+          </a:xfrm>
+          <a:prstGeom prst="rect">
+            <a:avLst/>
+          </a:prstGeom>
+          <a:noFill/>
+          <a:ln w="12700" cap="flat" cmpd="sng">
+            <a:noFill/>
+            <a:prstDash val="solid"/>
+            <a:round/>
+          </a:ln>
+        </p:spPr>
+        <p:txBody>
+          <a:bodyPr vert="horz" wrap="none" lIns="0" tIns="0" rIns="0" bIns="0" rtlCol="0" anchor="ctr" anchorCtr="0"/>
+          <a:p>
+            <a:pPr indent="0" algn="l">
+              <a:lnSpc>
+                <a:spcPct val="125000"/>
+              </a:lnSpc>
+              <a:defRPr/>
+            </a:pPr>
+            <a:r>
+              <a:rPr lang="zh-CN" altLang="en-US" sz="3200" b="1" dirty="0">
+                <a:solidFill>
+                  <a:srgbClr val="0052FF"/>
+                </a:solidFill>
+                <a:ea typeface="Noto Sans SC" panose="020B0200000000000000" charset="-122"/>
+                <a:sym typeface="Noto Sans SC" panose="020B0200000000000000" charset="-122"/>
+              </a:rPr>
+              <a:t>单阶段方法与双阶段</a:t>
+            </a:r>
+            <a:r>
+              <a:rPr lang="zh-CN" altLang="en-US" sz="3200" b="1" dirty="0">
+                <a:solidFill>
+                  <a:srgbClr val="0052FF"/>
+                </a:solidFill>
+                <a:ea typeface="Noto Sans SC" panose="020B0200000000000000" charset="-122"/>
+                <a:sym typeface="Noto Sans SC" panose="020B0200000000000000" charset="-122"/>
+              </a:rPr>
+              <a:t>方法</a:t>
+            </a:r>
+            <a:endParaRPr lang="zh-CN" altLang="en-US" sz="3200" b="1" dirty="0">
+              <a:solidFill>
+                <a:srgbClr val="0052FF"/>
+              </a:solidFill>
+              <a:ea typeface="Noto Sans SC" panose="020B0200000000000000" charset="-122"/>
+              <a:sym typeface="Noto Sans SC" panose="020B0200000000000000" charset="-122"/>
+            </a:endParaRPr>
+          </a:p>
+        </p:txBody>
+      </p:sp>
+      <p:sp>
+        <p:nvSpPr>
+          <p:cNvPr id="4" name="AutoShape 3"/>
+          <p:cNvSpPr/>
+          <p:nvPr/>
+        </p:nvSpPr>
+        <p:spPr>
+          <a:xfrm>
+            <a:off x="762000" y="1079500"/>
+            <a:ext cx="508000" cy="50800"/>
+          </a:xfrm>
+          <a:prstGeom prst="roundRect">
+            <a:avLst>
+              <a:gd name="adj" fmla="val 0"/>
+            </a:avLst>
+          </a:prstGeom>
+          <a:solidFill>
+            <a:srgbClr val="0052FF">
+              <a:alpha val="100000"/>
+            </a:srgbClr>
+          </a:solidFill>
+          <a:ln w="25400" cap="flat" cmpd="sng">
+            <a:noFill/>
+            <a:prstDash val="solid"/>
+            <a:round/>
+          </a:ln>
+        </p:spPr>
+        <p:txBody>
+          <a:bodyPr vert="horz" wrap="square" lIns="63500" tIns="63500" rIns="63500" bIns="63500" rtlCol="0" anchor="ctr"/>
+          <a:p>
+            <a:pPr algn="ctr">
+              <a:defRPr/>
+            </a:pPr>
+          </a:p>
+        </p:txBody>
+      </p:sp>
+      <p:sp>
+        <p:nvSpPr>
+          <p:cNvPr id="8" name="文本框 7"/>
+          <p:cNvSpPr txBox="1"/>
+          <p:nvPr/>
+        </p:nvSpPr>
+        <p:spPr>
+          <a:xfrm>
+            <a:off x="621030" y="1371600"/>
+            <a:ext cx="10802620" cy="922020"/>
+          </a:xfrm>
+          <a:prstGeom prst="rect">
+            <a:avLst/>
+          </a:prstGeom>
+          <a:noFill/>
+        </p:spPr>
+        <p:txBody>
+          <a:bodyPr wrap="square" rtlCol="0">
+            <a:spAutoFit/>
+          </a:bodyPr>
+          <a:p>
+            <a:r>
+              <a:rPr lang="en-US" altLang="zh-CN"/>
+              <a:t>1. </a:t>
+            </a:r>
+            <a:r>
+              <a:rPr lang="zh-CN" altLang="en-US"/>
+              <a:t>单阶段方法优先考虑推理速度，包括</a:t>
+            </a:r>
+            <a:r>
+              <a:rPr lang="en-US" altLang="zh-CN"/>
+              <a:t> YOLO</a:t>
+            </a:r>
+            <a:r>
+              <a:rPr lang="zh-CN" altLang="en-US"/>
+              <a:t>、</a:t>
+            </a:r>
+            <a:r>
+              <a:rPr lang="en-US" altLang="zh-CN"/>
+              <a:t>SSD </a:t>
+            </a:r>
+            <a:r>
+              <a:rPr lang="zh-CN" altLang="en-US"/>
+              <a:t>、</a:t>
+            </a:r>
+            <a:r>
+              <a:rPr lang="en-US" altLang="zh-CN"/>
+              <a:t> RetinaNet</a:t>
+            </a:r>
+            <a:endParaRPr lang="en-US" altLang="zh-CN"/>
+          </a:p>
+          <a:p>
+            <a:endParaRPr lang="zh-CN" altLang="en-US"/>
+          </a:p>
+          <a:p>
+            <a:r>
+              <a:rPr lang="en-US" altLang="zh-CN"/>
+              <a:t>2. </a:t>
+            </a:r>
+            <a:r>
+              <a:rPr lang="zh-CN" altLang="en-US"/>
+              <a:t>双阶段方法优先考虑检测精度，包括</a:t>
+            </a:r>
+            <a:r>
+              <a:rPr lang="en-US" altLang="zh-CN"/>
+              <a:t> Faster R-CNN</a:t>
+            </a:r>
+            <a:r>
+              <a:rPr lang="zh-CN" altLang="en-US"/>
+              <a:t>、</a:t>
+            </a:r>
+            <a:r>
+              <a:rPr lang="en-US" altLang="zh-CN"/>
+              <a:t>Mask R-CNN</a:t>
+            </a:r>
+            <a:endParaRPr lang="en-US" altLang="zh-CN"/>
+          </a:p>
+        </p:txBody>
+      </p:sp>
+      <p:pic>
+        <p:nvPicPr>
+          <p:cNvPr id="9" name="图片 8"/>
+          <p:cNvPicPr>
+            <a:picLocks noChangeAspect="1"/>
+          </p:cNvPicPr>
+          <p:nvPr/>
+        </p:nvPicPr>
+        <p:blipFill>
+          <a:blip r:embed="rId1"/>
+          <a:stretch>
+            <a:fillRect/>
+          </a:stretch>
+        </p:blipFill>
+        <p:spPr>
+          <a:xfrm>
+            <a:off x="405765" y="2722880"/>
+            <a:ext cx="7310755" cy="3613785"/>
+          </a:xfrm>
+          <a:prstGeom prst="rect">
+            <a:avLst/>
+          </a:prstGeom>
+        </p:spPr>
+      </p:pic>
+      <p:pic>
+        <p:nvPicPr>
+          <p:cNvPr id="12" name="图片 11"/>
+          <p:cNvPicPr>
+            <a:picLocks noChangeAspect="1"/>
+          </p:cNvPicPr>
+          <p:nvPr/>
+        </p:nvPicPr>
+        <p:blipFill>
+          <a:blip r:embed="rId2"/>
+          <a:stretch>
+            <a:fillRect/>
+          </a:stretch>
+        </p:blipFill>
+        <p:spPr>
+          <a:xfrm>
+            <a:off x="7716520" y="2673350"/>
+            <a:ext cx="4467225" cy="4176395"/>
+          </a:xfrm>
+          <a:prstGeom prst="rect">
+            <a:avLst/>
+          </a:prstGeom>
+        </p:spPr>
+      </p:pic>
+    </p:spTree>
+  </p:cSld>
+  <p:clrMapOvr>
+    <a:masterClrMapping/>
+  </p:clrMapOvr>
+</p:sld>
+</file>
+
+<file path=ppt/slides/slide5.xml><?xml version="1.0" encoding="utf-8"?>
+<p:sld xmlns:a="http://schemas.openxmlformats.org/drawingml/2006/main" xmlns:r="http://schemas.openxmlformats.org/officeDocument/2006/relationships" xmlns:p="http://schemas.openxmlformats.org/presentationml/2006/main">
+  <p:cSld>
+    <p:spTree>
+      <p:nvGrpSpPr>
+        <p:cNvPr id="1" name=""/>
+        <p:cNvGrpSpPr/>
+        <p:nvPr/>
+      </p:nvGrpSpPr>
+      <p:grpSpPr/>
+      <p:sp>
+        <p:nvSpPr>
+          <p:cNvPr id="5" name="AutoShape 2"/>
+          <p:cNvSpPr/>
+          <p:nvPr/>
+        </p:nvSpPr>
+        <p:spPr>
+          <a:xfrm>
+            <a:off x="762000" y="508000"/>
+            <a:ext cx="3581400" cy="508000"/>
+          </a:xfrm>
+          <a:prstGeom prst="rect">
+            <a:avLst/>
+          </a:prstGeom>
+          <a:noFill/>
+          <a:ln w="12700" cap="flat" cmpd="sng">
+            <a:noFill/>
+            <a:prstDash val="solid"/>
+            <a:round/>
+          </a:ln>
+        </p:spPr>
+        <p:txBody>
+          <a:bodyPr vert="horz" wrap="none" lIns="0" tIns="0" rIns="0" bIns="0" rtlCol="0" anchor="ctr" anchorCtr="0"/>
+          <a:p>
+            <a:pPr indent="0" algn="l">
+              <a:lnSpc>
+                <a:spcPct val="125000"/>
+              </a:lnSpc>
+              <a:defRPr/>
+            </a:pPr>
+            <a:r>
+              <a:rPr lang="zh-CN" altLang="en-US" sz="3200" b="1" dirty="0">
+                <a:solidFill>
+                  <a:srgbClr val="0052FF"/>
+                </a:solidFill>
+                <a:ea typeface="Noto Sans SC" panose="020B0200000000000000" charset="-122"/>
+                <a:sym typeface="Noto Sans SC" panose="020B0200000000000000" charset="-122"/>
+              </a:rPr>
+              <a:t>边界框</a:t>
+            </a:r>
+            <a:endParaRPr lang="zh-CN" altLang="en-US" sz="3200" b="1" dirty="0">
+              <a:solidFill>
+                <a:srgbClr val="0052FF"/>
+              </a:solidFill>
+              <a:ea typeface="Noto Sans SC" panose="020B0200000000000000" charset="-122"/>
+              <a:sym typeface="Noto Sans SC" panose="020B0200000000000000" charset="-122"/>
+            </a:endParaRPr>
+          </a:p>
+        </p:txBody>
+      </p:sp>
+      <p:sp>
+        <p:nvSpPr>
+          <p:cNvPr id="4" name="AutoShape 3"/>
+          <p:cNvSpPr/>
+          <p:nvPr/>
+        </p:nvSpPr>
+        <p:spPr>
+          <a:xfrm>
+            <a:off x="762000" y="1079500"/>
+            <a:ext cx="508000" cy="50800"/>
+          </a:xfrm>
+          <a:prstGeom prst="roundRect">
+            <a:avLst>
+              <a:gd name="adj" fmla="val 0"/>
+            </a:avLst>
+          </a:prstGeom>
+          <a:solidFill>
+            <a:srgbClr val="0052FF">
+              <a:alpha val="100000"/>
+            </a:srgbClr>
+          </a:solidFill>
+          <a:ln w="25400" cap="flat" cmpd="sng">
+            <a:noFill/>
+            <a:prstDash val="solid"/>
+            <a:round/>
+          </a:ln>
+        </p:spPr>
+        <p:txBody>
+          <a:bodyPr vert="horz" wrap="square" lIns="63500" tIns="63500" rIns="63500" bIns="63500" rtlCol="0" anchor="ctr"/>
+          <a:p>
+            <a:pPr algn="ctr">
+              <a:defRPr/>
+            </a:pPr>
+          </a:p>
+        </p:txBody>
+      </p:sp>
+      <p:sp>
+        <p:nvSpPr>
+          <p:cNvPr id="6" name="文本框 5"/>
+          <p:cNvSpPr txBox="1"/>
+          <p:nvPr/>
+        </p:nvSpPr>
+        <p:spPr>
+          <a:xfrm>
+            <a:off x="401955" y="1252855"/>
+            <a:ext cx="11309350" cy="922020"/>
+          </a:xfrm>
+          <a:prstGeom prst="rect">
+            <a:avLst/>
+          </a:prstGeom>
+          <a:noFill/>
+        </p:spPr>
+        <p:txBody>
+          <a:bodyPr wrap="square" rtlCol="0">
+            <a:spAutoFit/>
+          </a:bodyPr>
+          <a:p>
+            <a:r>
+              <a:rPr lang="en-US" altLang="zh-CN"/>
+              <a:t>- </a:t>
+            </a:r>
+            <a:r>
+              <a:rPr lang="zh-CN" altLang="en-US"/>
+              <a:t>边界框是用于计算机视觉</a:t>
+            </a:r>
+            <a:r>
+              <a:rPr lang="en-US" altLang="zh-CN"/>
+              <a:t> (CV) </a:t>
+            </a:r>
+            <a:r>
+              <a:rPr lang="zh-CN" altLang="en-US"/>
+              <a:t>任务的矩形区域标签。</a:t>
+            </a:r>
+            <a:endParaRPr lang="zh-CN" altLang="en-US"/>
+          </a:p>
+          <a:p>
+            <a:endParaRPr lang="en-US" altLang="zh-CN"/>
+          </a:p>
+          <a:p>
+            <a:r>
+              <a:rPr lang="en-US" altLang="zh-CN"/>
+              <a:t>- </a:t>
+            </a:r>
+            <a:r>
+              <a:rPr lang="zh-CN" altLang="en-US"/>
+              <a:t>在监督式机器学习</a:t>
+            </a:r>
+            <a:r>
+              <a:rPr lang="en-US" altLang="zh-CN"/>
+              <a:t> (ML) </a:t>
+            </a:r>
+            <a:r>
+              <a:rPr lang="zh-CN" altLang="en-US"/>
+              <a:t>中，目标检测模型使用边界框标签来学习图像的内容。</a:t>
+            </a:r>
+            <a:endParaRPr lang="zh-CN" altLang="en-US"/>
+          </a:p>
+        </p:txBody>
+      </p:sp>
+      <p:pic>
+        <p:nvPicPr>
+          <p:cNvPr id="7" name="图片 6"/>
+          <p:cNvPicPr>
+            <a:picLocks noChangeAspect="1"/>
+          </p:cNvPicPr>
+          <p:nvPr/>
+        </p:nvPicPr>
+        <p:blipFill>
+          <a:blip r:embed="rId1"/>
+          <a:stretch>
+            <a:fillRect/>
+          </a:stretch>
+        </p:blipFill>
+        <p:spPr>
+          <a:xfrm>
+            <a:off x="8902700" y="111125"/>
+            <a:ext cx="3118485" cy="2356485"/>
+          </a:xfrm>
+          <a:prstGeom prst="rect">
+            <a:avLst/>
+          </a:prstGeom>
+        </p:spPr>
+      </p:pic>
+      <p:pic>
+        <p:nvPicPr>
+          <p:cNvPr id="9" name="图片 8"/>
+          <p:cNvPicPr>
+            <a:picLocks noChangeAspect="1"/>
+          </p:cNvPicPr>
+          <p:nvPr/>
+        </p:nvPicPr>
+        <p:blipFill>
+          <a:blip r:embed="rId2"/>
+          <a:stretch>
+            <a:fillRect/>
+          </a:stretch>
+        </p:blipFill>
+        <p:spPr>
+          <a:xfrm>
+            <a:off x="168275" y="2611120"/>
+            <a:ext cx="6836410" cy="4104005"/>
+          </a:xfrm>
+          <a:prstGeom prst="rect">
+            <a:avLst/>
+          </a:prstGeom>
+        </p:spPr>
+      </p:pic>
+      <p:sp>
+        <p:nvSpPr>
+          <p:cNvPr id="10" name="文本框 9"/>
+          <p:cNvSpPr txBox="1"/>
+          <p:nvPr/>
+        </p:nvSpPr>
+        <p:spPr>
+          <a:xfrm>
+            <a:off x="6821805" y="3031490"/>
+            <a:ext cx="5182235" cy="889000"/>
+          </a:xfrm>
+          <a:prstGeom prst="rect">
+            <a:avLst/>
+          </a:prstGeom>
+          <a:noFill/>
+        </p:spPr>
+        <p:txBody>
+          <a:bodyPr wrap="square" rtlCol="0">
+            <a:noAutofit/>
+          </a:bodyPr>
+          <a:p>
+            <a:r>
+              <a:rPr lang="zh-CN" altLang="en-US"/>
+              <a:t>对于每个边界框，我们测量预测边界框与真实边界框之间的重叠度。重叠度通过交并比</a:t>
+            </a:r>
+            <a:r>
+              <a:rPr lang="en-US" altLang="zh-CN"/>
+              <a:t> (IoU) </a:t>
+            </a:r>
+            <a:r>
+              <a:rPr lang="zh-CN" altLang="en-US"/>
+              <a:t>来衡量。</a:t>
+            </a:r>
+            <a:endParaRPr lang="zh-CN" altLang="en-US"/>
+          </a:p>
+          <a:p>
+            <a:endParaRPr lang="zh-CN" altLang="en-US"/>
+          </a:p>
+          <a:p>
+            <a:endParaRPr lang="zh-CN" altLang="en-US"/>
+          </a:p>
+        </p:txBody>
+      </p:sp>
+      <p:pic>
+        <p:nvPicPr>
+          <p:cNvPr id="11" name="图片 10"/>
+          <p:cNvPicPr>
+            <a:picLocks noChangeAspect="1"/>
+          </p:cNvPicPr>
+          <p:nvPr/>
+        </p:nvPicPr>
+        <p:blipFill>
+          <a:blip r:embed="rId3"/>
+          <a:stretch>
+            <a:fillRect/>
+          </a:stretch>
+        </p:blipFill>
+        <p:spPr>
+          <a:xfrm>
+            <a:off x="6967220" y="4176395"/>
+            <a:ext cx="5053965" cy="2425065"/>
+          </a:xfrm>
+          <a:prstGeom prst="rect">
+            <a:avLst/>
+          </a:prstGeom>
+        </p:spPr>
+      </p:pic>
     </p:spTree>
   </p:cSld>
   <p:clrMapOvr>

--- a/高级软件工程.pptx
+++ b/高级软件工程.pptx
@@ -10,6 +10,7 @@
     <p:sldId id="258" r:id="rId5"/>
     <p:sldId id="259" r:id="rId6"/>
     <p:sldId id="260" r:id="rId7"/>
+    <p:sldId id="261" r:id="rId8"/>
   </p:sldIdLst>
   <p:sldSz cx="12192000" cy="6858000"/>
   <p:notesSz cx="6858000" cy="9144000"/>
@@ -3877,6 +3878,110 @@
 </p:sld>
 </file>
 
+<file path=ppt/slides/slide6.xml><?xml version="1.0" encoding="utf-8"?>
+<p:sld xmlns:a="http://schemas.openxmlformats.org/drawingml/2006/main" xmlns:r="http://schemas.openxmlformats.org/officeDocument/2006/relationships" xmlns:p="http://schemas.openxmlformats.org/presentationml/2006/main">
+  <p:cSld>
+    <p:spTree>
+      <p:nvGrpSpPr>
+        <p:cNvPr id="1" name=""/>
+        <p:cNvGrpSpPr/>
+        <p:nvPr/>
+      </p:nvGrpSpPr>
+      <p:grpSpPr/>
+      <p:sp>
+        <p:nvSpPr>
+          <p:cNvPr id="5" name="AutoShape 2"/>
+          <p:cNvSpPr/>
+          <p:nvPr/>
+        </p:nvSpPr>
+        <p:spPr>
+          <a:xfrm>
+            <a:off x="762000" y="508000"/>
+            <a:ext cx="3581400" cy="508000"/>
+          </a:xfrm>
+          <a:prstGeom prst="rect">
+            <a:avLst/>
+          </a:prstGeom>
+          <a:noFill/>
+          <a:ln w="12700" cap="flat" cmpd="sng">
+            <a:noFill/>
+            <a:prstDash val="solid"/>
+            <a:round/>
+          </a:ln>
+        </p:spPr>
+        <p:txBody>
+          <a:bodyPr vert="horz" wrap="none" lIns="0" tIns="0" rIns="0" bIns="0" rtlCol="0" anchor="ctr" anchorCtr="0"/>
+          <a:p>
+            <a:pPr indent="0" algn="l">
+              <a:lnSpc>
+                <a:spcPct val="125000"/>
+              </a:lnSpc>
+              <a:defRPr/>
+            </a:pPr>
+            <a:r>
+              <a:rPr lang="zh-CN" altLang="en-US" sz="3200" b="1" dirty="0">
+                <a:solidFill>
+                  <a:srgbClr val="0052FF"/>
+                </a:solidFill>
+                <a:ea typeface="Noto Sans SC" panose="020B0200000000000000" charset="-122"/>
+                <a:sym typeface="Noto Sans SC" panose="020B0200000000000000" charset="-122"/>
+              </a:rPr>
+              <a:t>边界框</a:t>
+            </a:r>
+            <a:endParaRPr lang="zh-CN" altLang="en-US" sz="3200" b="1" dirty="0">
+              <a:solidFill>
+                <a:srgbClr val="0052FF"/>
+              </a:solidFill>
+              <a:ea typeface="Noto Sans SC" panose="020B0200000000000000" charset="-122"/>
+              <a:sym typeface="Noto Sans SC" panose="020B0200000000000000" charset="-122"/>
+            </a:endParaRPr>
+          </a:p>
+        </p:txBody>
+      </p:sp>
+      <p:sp>
+        <p:nvSpPr>
+          <p:cNvPr id="4" name="AutoShape 3"/>
+          <p:cNvSpPr/>
+          <p:nvPr/>
+        </p:nvSpPr>
+        <p:spPr>
+          <a:xfrm>
+            <a:off x="762000" y="1079500"/>
+            <a:ext cx="508000" cy="50800"/>
+          </a:xfrm>
+          <a:prstGeom prst="roundRect">
+            <a:avLst>
+              <a:gd name="adj" fmla="val 0"/>
+            </a:avLst>
+          </a:prstGeom>
+          <a:solidFill>
+            <a:srgbClr val="0052FF">
+              <a:alpha val="100000"/>
+            </a:srgbClr>
+          </a:solidFill>
+          <a:ln w="25400" cap="flat" cmpd="sng">
+            <a:noFill/>
+            <a:prstDash val="solid"/>
+            <a:round/>
+          </a:ln>
+        </p:spPr>
+        <p:txBody>
+          <a:bodyPr vert="horz" wrap="square" lIns="63500" tIns="63500" rIns="63500" bIns="63500" rtlCol="0" anchor="ctr"/>
+          <a:p>
+            <a:pPr algn="ctr">
+              <a:defRPr/>
+            </a:pPr>
+          </a:p>
+        </p:txBody>
+      </p:sp>
+    </p:spTree>
+  </p:cSld>
+  <p:clrMapOvr>
+    <a:masterClrMapping/>
+  </p:clrMapOvr>
+</p:sld>
+</file>
+
 <file path=ppt/theme/theme1.xml><?xml version="1.0" encoding="utf-8"?>
 <a:theme xmlns:a="http://schemas.openxmlformats.org/drawingml/2006/main" name="WPS">
   <a:themeElements>
